--- a/Tableau/exports/Fleet Operations Snapshot.pptx
+++ b/Tableau/exports/Fleet Operations Snapshot.pptx
@@ -3327,7 +3327,7 @@
           <p:cNvPr id="0" name="slide1">
             <a:extLst>
               <a:ext uri="{FF2B5EF4-FFF2-40B4-BE49-F238E27FC236}">
-                <a16:creationId xmlns:a16="http://schemas.microsoft.com/office/drawing/2014/main" id="{8382DE2B-55F8-4A9C-8898-C85C4E0B0751}"/>
+                <a16:creationId xmlns:a16="http://schemas.microsoft.com/office/drawing/2014/main" id="{EEBD23DF-2BC9-4358-9A58-C15057AE72BB}"/>
               </a:ext>
             </a:extLst>
           </p:cNvPr>
@@ -3357,7 +3357,7 @@
           <p:cNvPr id="1" name="slide1">
             <a:extLst>
               <a:ext uri="{FF2B5EF4-FFF2-40B4-BE49-F238E27FC236}">
-                <a16:creationId xmlns:a16="http://schemas.microsoft.com/office/drawing/2014/main" id="{06C71642-0B68-4527-9D9C-095C3D47D333}"/>
+                <a16:creationId xmlns:a16="http://schemas.microsoft.com/office/drawing/2014/main" id="{C7CAA13B-BDA1-47DF-850A-44FD0C057B87}"/>
               </a:ext>
             </a:extLst>
           </p:cNvPr>
@@ -3375,7 +3375,7 @@
           <a:p>
             <a:r>
               <a:rPr/>
-              <a:t>File created on: 6/3/2026 7:49:59 AM</a:t>
+              <a:t>File created on: 6/3/2026 8:04:13 AM</a:t>
             </a:r>
           </a:p>
         </p:txBody>
@@ -3415,7 +3415,7 @@
           <p:cNvPr descr="Fleet Operations Snapshot" id="2" name="slide2">
             <a:extLst>
               <a:ext uri="{FF2B5EF4-FFF2-40B4-BE49-F238E27FC236}">
-                <a16:creationId xmlns:a16="http://schemas.microsoft.com/office/drawing/2014/main" id="{3A7D4D98-CD7B-4EA9-AEE3-446520E98EB5}"/>
+                <a16:creationId xmlns:a16="http://schemas.microsoft.com/office/drawing/2014/main" id="{7B5ECC61-590A-4338-B3E3-7DA5AE42187A}"/>
               </a:ext>
             </a:extLst>
           </p:cNvPr>
@@ -3438,8 +3438,8 @@
         </p:blipFill>
         <p:spPr>
           <a:xfrm>
-            <a:off x="0" y="236518"/>
-            <a:ext cx="12192000" cy="6384962"/>
+            <a:off x="0" y="431865"/>
+            <a:ext cx="12192000" cy="5994270"/>
           </a:xfrm>
           <a:prstGeom prst="rect">
             <a:avLst/>
